--- a/lesson_bonus-exam_and_project_discussion_qa/lesson_bonus-exam_and_project_discussion_qa.pptx
+++ b/lesson_bonus-exam_and_project_discussion_qa/lesson_bonus-exam_and_project_discussion_qa.pptx
@@ -219,7 +219,7 @@
           <a:p>
             <a:fld id="{81C4B3FE-0320-8142-8396-5C3025C019EC}" type="datetimeFigureOut">
               <a:rPr lang="en-IT" smtClean="0"/>
-              <a:t>2/19/26</a:t>
+              <a:t>5/21/26</a:t>
             </a:fld>
             <a:endParaRPr lang="en-IT"/>
           </a:p>
@@ -6617,7 +6617,7 @@
         </p:spPr>
         <p:txBody>
           <a:bodyPr>
-            <a:normAutofit/>
+            <a:normAutofit lnSpcReduction="10000"/>
           </a:bodyPr>
           <a:lstStyle/>
           <a:p>
@@ -6706,22 +6706,37 @@
             </a:endParaRPr>
           </a:p>
           <a:p>
-            <a:pPr lvl="0">
+            <a:pPr>
               <a:spcAft>
                 <a:spcPts val="800"/>
               </a:spcAft>
             </a:pPr>
             <a:r>
+              <a:rPr lang="en-US" dirty="0"/>
+              <a:t>The questions will focus on the course content presented during both the “theory” and the “laboratory” lessons </a:t>
+            </a:r>
+            <a:r>
               <a:rPr lang="en-US" dirty="0">
                 <a:ea typeface="Calibri" panose="020F0502020204030204" pitchFamily="34" charset="0"/>
                 <a:cs typeface="Times New Roman" panose="02020603050405020304" pitchFamily="18" charset="0"/>
               </a:rPr>
-              <a:t>The theory exam will cover all the theory program except the material marked as  </a:t>
+              <a:t>except the material marked as  </a:t>
             </a:r>
             <a:endParaRPr lang="it-IT" dirty="0">
               <a:ea typeface="Calibri" panose="020F0502020204030204" pitchFamily="34" charset="0"/>
               <a:cs typeface="Times New Roman" panose="02020603050405020304" pitchFamily="18" charset="0"/>
             </a:endParaRPr>
+          </a:p>
+          <a:p>
+            <a:pPr>
+              <a:spcAft>
+                <a:spcPts val="800"/>
+              </a:spcAft>
+            </a:pPr>
+            <a:r>
+              <a:rPr lang="en-US" dirty="0"/>
+              <a:t>In any case, no questions will require to write Dart/Flutter code. </a:t>
+            </a:r>
           </a:p>
           <a:p>
             <a:pPr marL="0" indent="0">
@@ -6778,7 +6793,7 @@
         </p:nvSpPr>
         <p:spPr>
           <a:xfrm>
-            <a:off x="915161" y="5496833"/>
+            <a:off x="8751222" y="5126443"/>
             <a:ext cx="998622" cy="232651"/>
           </a:xfrm>
           <a:prstGeom prst="rect">
@@ -7084,8 +7099,8 @@
           </a:p>
         </p:txBody>
       </p:sp>
-      <mc:AlternateContent xmlns:mc="http://schemas.openxmlformats.org/markup-compatibility/2006">
-        <mc:Choice xmlns:a14="http://schemas.microsoft.com/office/drawing/2010/main" Requires="a14">
+      <mc:AlternateContent xmlns:mc="http://schemas.openxmlformats.org/markup-compatibility/2006" xmlns:a14="http://schemas.microsoft.com/office/drawing/2010/main">
+        <mc:Choice Requires="a14">
           <p:sp>
             <p:nvSpPr>
               <p:cNvPr id="3" name="Segnaposto contenuto 2">
@@ -7378,7 +7393,7 @@
             </p:txBody>
           </p:sp>
         </mc:Choice>
-        <mc:Fallback>
+        <mc:Fallback xmlns="">
           <p:sp>
             <p:nvSpPr>
               <p:cNvPr id="3" name="Segnaposto contenuto 2">

--- a/lesson_bonus-exam_and_project_discussion_qa/lesson_bonus-exam_and_project_discussion_qa.pptx
+++ b/lesson_bonus-exam_and_project_discussion_qa/lesson_bonus-exam_and_project_discussion_qa.pptx
@@ -219,7 +219,7 @@
           <a:p>
             <a:fld id="{81C4B3FE-0320-8142-8396-5C3025C019EC}" type="datetimeFigureOut">
               <a:rPr lang="en-IT" smtClean="0"/>
-              <a:t>5/21/26</a:t>
+              <a:t>6/5/26</a:t>
             </a:fld>
             <a:endParaRPr lang="en-IT"/>
           </a:p>
@@ -7099,8 +7099,8 @@
           </a:p>
         </p:txBody>
       </p:sp>
-      <mc:AlternateContent xmlns:mc="http://schemas.openxmlformats.org/markup-compatibility/2006" xmlns:a14="http://schemas.microsoft.com/office/drawing/2010/main">
-        <mc:Choice Requires="a14">
+      <mc:AlternateContent xmlns:mc="http://schemas.openxmlformats.org/markup-compatibility/2006">
+        <mc:Choice xmlns:a14="http://schemas.microsoft.com/office/drawing/2010/main" Requires="a14">
           <p:sp>
             <p:nvSpPr>
               <p:cNvPr id="3" name="Segnaposto contenuto 2">
@@ -7125,7 +7125,7 @@
             </p:spPr>
             <p:txBody>
               <a:bodyPr>
-                <a:normAutofit fontScale="92500"/>
+                <a:normAutofit/>
               </a:bodyPr>
               <a:lstStyle/>
               <a:p>
@@ -7156,12 +7156,6 @@
                 <a:endParaRPr lang="en-GB" dirty="0"/>
               </a:p>
               <a:p>
-                <a:r>
-                  <a:rPr lang="en-GB" dirty="0"/>
-                  <a:t>The vote of the theory exam accounts for 2/3 of the final mark. </a:t>
-                </a:r>
-              </a:p>
-              <a:p>
                 <a:pPr marL="0" indent="0">
                   <a:buNone/>
                 </a:pPr>
@@ -7180,203 +7174,171 @@
                     </m:oMathParaPr>
                     <m:oMath xmlns:m="http://schemas.openxmlformats.org/officeDocument/2006/math">
                       <m:r>
-                        <a:rPr lang="it-IT" b="0" i="1" smtClean="0">
+                        <a:rPr lang="it-IT" sz="2000" b="0" i="1" smtClean="0">
                           <a:latin typeface="Cambria Math" panose="02040503050406030204" pitchFamily="18" charset="0"/>
                         </a:rPr>
                         <m:t>𝑓𝑖𝑛𝑎𝑙</m:t>
                       </m:r>
                       <m:r>
-                        <a:rPr lang="it-IT" b="0" i="1" smtClean="0">
+                        <a:rPr lang="it-IT" sz="2000" b="0" i="1" smtClean="0">
                           <a:latin typeface="Cambria Math" panose="02040503050406030204" pitchFamily="18" charset="0"/>
                         </a:rPr>
                         <m:t> </m:t>
                       </m:r>
                       <m:r>
-                        <a:rPr lang="it-IT" b="0" i="1" smtClean="0">
+                        <a:rPr lang="it-IT" sz="2000" b="0" i="1" smtClean="0">
                           <a:latin typeface="Cambria Math" panose="02040503050406030204" pitchFamily="18" charset="0"/>
                         </a:rPr>
                         <m:t>𝑚𝑎𝑟𝑘</m:t>
                       </m:r>
                       <m:r>
-                        <a:rPr lang="it-IT" b="0" i="1" smtClean="0">
+                        <a:rPr lang="it-IT" sz="2000" b="0" i="1" smtClean="0">
                           <a:latin typeface="Cambria Math" panose="02040503050406030204" pitchFamily="18" charset="0"/>
                         </a:rPr>
                         <m:t>= </m:t>
                       </m:r>
-                      <m:f>
-                        <m:fPr>
-                          <m:ctrlPr>
-                            <a:rPr lang="it-IT" b="0" i="1" smtClean="0">
-                              <a:latin typeface="Cambria Math" panose="02040503050406030204" pitchFamily="18" charset="0"/>
-                            </a:rPr>
-                          </m:ctrlPr>
-                        </m:fPr>
-                        <m:num>
-                          <m:r>
-                            <a:rPr lang="it-IT" b="0" i="1" smtClean="0">
-                              <a:latin typeface="Cambria Math" panose="02040503050406030204" pitchFamily="18" charset="0"/>
-                            </a:rPr>
-                            <m:t>2</m:t>
-                          </m:r>
-                        </m:num>
-                        <m:den>
-                          <m:r>
-                            <a:rPr lang="it-IT" b="0" i="1" smtClean="0">
-                              <a:latin typeface="Cambria Math" panose="02040503050406030204" pitchFamily="18" charset="0"/>
-                            </a:rPr>
-                            <m:t>3</m:t>
-                          </m:r>
-                        </m:den>
-                      </m:f>
                       <m:r>
-                        <a:rPr lang="it-IT" b="0" i="1" smtClean="0">
-                          <a:latin typeface="Cambria Math" panose="02040503050406030204" pitchFamily="18" charset="0"/>
-                          <a:ea typeface="Cambria Math" panose="02040503050406030204" pitchFamily="18" charset="0"/>
-                        </a:rPr>
-                        <m:t>∙</m:t>
-                      </m:r>
-                      <m:r>
-                        <a:rPr lang="it-IT" b="0" i="1" smtClean="0">
+                        <a:rPr lang="it-IT" sz="2000" b="0" i="1" smtClean="0">
                           <a:latin typeface="Cambria Math" panose="02040503050406030204" pitchFamily="18" charset="0"/>
                           <a:ea typeface="Cambria Math" panose="02040503050406030204" pitchFamily="18" charset="0"/>
                         </a:rPr>
                         <m:t>𝑚𝑎𝑟𝑘</m:t>
                       </m:r>
                       <m:r>
-                        <a:rPr lang="it-IT" b="0" i="1" smtClean="0">
+                        <a:rPr lang="it-IT" sz="2000" b="0" i="1" smtClean="0">
                           <a:latin typeface="Cambria Math" panose="02040503050406030204" pitchFamily="18" charset="0"/>
                           <a:ea typeface="Cambria Math" panose="02040503050406030204" pitchFamily="18" charset="0"/>
                         </a:rPr>
                         <m:t> </m:t>
                       </m:r>
                       <m:r>
-                        <a:rPr lang="it-IT" b="0" i="1" smtClean="0">
+                        <a:rPr lang="it-IT" sz="2000" b="0" i="1" smtClean="0">
                           <a:latin typeface="Cambria Math" panose="02040503050406030204" pitchFamily="18" charset="0"/>
                           <a:ea typeface="Cambria Math" panose="02040503050406030204" pitchFamily="18" charset="0"/>
                         </a:rPr>
                         <m:t>𝑜𝑓</m:t>
                       </m:r>
                       <m:r>
-                        <a:rPr lang="it-IT" b="0" i="1" smtClean="0">
+                        <a:rPr lang="it-IT" sz="2000" b="0" i="1" smtClean="0">
                           <a:latin typeface="Cambria Math" panose="02040503050406030204" pitchFamily="18" charset="0"/>
                           <a:ea typeface="Cambria Math" panose="02040503050406030204" pitchFamily="18" charset="0"/>
                         </a:rPr>
                         <m:t> </m:t>
                       </m:r>
                       <m:r>
-                        <a:rPr lang="it-IT" b="0" i="1" smtClean="0">
+                        <a:rPr lang="it-IT" sz="2000" b="0" i="1" smtClean="0">
                           <a:latin typeface="Cambria Math" panose="02040503050406030204" pitchFamily="18" charset="0"/>
                           <a:ea typeface="Cambria Math" panose="02040503050406030204" pitchFamily="18" charset="0"/>
                         </a:rPr>
                         <m:t>𝑡h𝑒</m:t>
                       </m:r>
                       <m:r>
-                        <a:rPr lang="it-IT" b="0" i="1" smtClean="0">
+                        <a:rPr lang="it-IT" sz="2000" b="0" i="1" smtClean="0">
                           <a:latin typeface="Cambria Math" panose="02040503050406030204" pitchFamily="18" charset="0"/>
                           <a:ea typeface="Cambria Math" panose="02040503050406030204" pitchFamily="18" charset="0"/>
                         </a:rPr>
                         <m:t> </m:t>
                       </m:r>
                       <m:r>
-                        <a:rPr lang="it-IT" b="0" i="1" smtClean="0">
+                        <a:rPr lang="it-IT" sz="2000" b="0" i="1" smtClean="0">
                           <a:latin typeface="Cambria Math" panose="02040503050406030204" pitchFamily="18" charset="0"/>
                           <a:ea typeface="Cambria Math" panose="02040503050406030204" pitchFamily="18" charset="0"/>
                         </a:rPr>
                         <m:t>𝑡h𝑒𝑜𝑟𝑦</m:t>
                       </m:r>
                       <m:r>
-                        <a:rPr lang="it-IT" b="0" i="1" smtClean="0">
+                        <a:rPr lang="it-IT" sz="2000" b="0" i="1" smtClean="0">
                           <a:latin typeface="Cambria Math" panose="02040503050406030204" pitchFamily="18" charset="0"/>
                           <a:ea typeface="Cambria Math" panose="02040503050406030204" pitchFamily="18" charset="0"/>
                         </a:rPr>
                         <m:t> </m:t>
                       </m:r>
                       <m:r>
-                        <a:rPr lang="it-IT" b="0" i="1" smtClean="0">
+                        <a:rPr lang="it-IT" sz="2000" b="0" i="1" smtClean="0">
                           <a:latin typeface="Cambria Math" panose="02040503050406030204" pitchFamily="18" charset="0"/>
                           <a:ea typeface="Cambria Math" panose="02040503050406030204" pitchFamily="18" charset="0"/>
                         </a:rPr>
                         <m:t>𝑒𝑥𝑎𝑚</m:t>
                       </m:r>
                       <m:r>
-                        <a:rPr lang="it-IT" b="0" i="1" smtClean="0">
+                        <a:rPr lang="it-IT" sz="2000" b="0" i="1" smtClean="0">
                           <a:latin typeface="Cambria Math" panose="02040503050406030204" pitchFamily="18" charset="0"/>
                           <a:ea typeface="Cambria Math" panose="02040503050406030204" pitchFamily="18" charset="0"/>
                         </a:rPr>
                         <m:t>+</m:t>
                       </m:r>
                       <m:r>
-                        <a:rPr lang="it-IT" b="0" i="1" smtClean="0">
+                        <a:rPr lang="it-IT" sz="2000" b="0" i="1" smtClean="0">
                           <a:latin typeface="Cambria Math" panose="02040503050406030204" pitchFamily="18" charset="0"/>
                           <a:ea typeface="Cambria Math" panose="02040503050406030204" pitchFamily="18" charset="0"/>
                         </a:rPr>
                         <m:t>𝑚𝑎𝑟𝑘</m:t>
                       </m:r>
                       <m:r>
-                        <a:rPr lang="it-IT" b="0" i="1" smtClean="0">
+                        <a:rPr lang="it-IT" sz="2000" b="0" i="1" smtClean="0">
                           <a:latin typeface="Cambria Math" panose="02040503050406030204" pitchFamily="18" charset="0"/>
                           <a:ea typeface="Cambria Math" panose="02040503050406030204" pitchFamily="18" charset="0"/>
                         </a:rPr>
                         <m:t> </m:t>
                       </m:r>
                       <m:r>
-                        <a:rPr lang="it-IT" b="0" i="1" smtClean="0">
+                        <a:rPr lang="it-IT" sz="2000" b="0" i="1" smtClean="0">
                           <a:latin typeface="Cambria Math" panose="02040503050406030204" pitchFamily="18" charset="0"/>
                           <a:ea typeface="Cambria Math" panose="02040503050406030204" pitchFamily="18" charset="0"/>
                         </a:rPr>
                         <m:t>𝑜𝑓</m:t>
                       </m:r>
                       <m:r>
-                        <a:rPr lang="it-IT" b="0" i="1" smtClean="0">
+                        <a:rPr lang="it-IT" sz="2000" b="0" i="1" smtClean="0">
                           <a:latin typeface="Cambria Math" panose="02040503050406030204" pitchFamily="18" charset="0"/>
                           <a:ea typeface="Cambria Math" panose="02040503050406030204" pitchFamily="18" charset="0"/>
                         </a:rPr>
                         <m:t> </m:t>
                       </m:r>
                       <m:r>
-                        <a:rPr lang="it-IT" b="0" i="1" smtClean="0">
+                        <a:rPr lang="it-IT" sz="2000" b="0" i="1" smtClean="0">
                           <a:latin typeface="Cambria Math" panose="02040503050406030204" pitchFamily="18" charset="0"/>
                           <a:ea typeface="Cambria Math" panose="02040503050406030204" pitchFamily="18" charset="0"/>
                         </a:rPr>
                         <m:t>𝑡h𝑒</m:t>
                       </m:r>
                       <m:r>
-                        <a:rPr lang="it-IT" b="0" i="1" smtClean="0">
+                        <a:rPr lang="it-IT" sz="2000" b="0" i="1" smtClean="0">
                           <a:latin typeface="Cambria Math" panose="02040503050406030204" pitchFamily="18" charset="0"/>
                           <a:ea typeface="Cambria Math" panose="02040503050406030204" pitchFamily="18" charset="0"/>
                         </a:rPr>
                         <m:t> </m:t>
                       </m:r>
                       <m:r>
-                        <a:rPr lang="it-IT" b="0" i="1" smtClean="0">
+                        <a:rPr lang="it-IT" sz="2000" b="0" i="1" smtClean="0">
                           <a:latin typeface="Cambria Math" panose="02040503050406030204" pitchFamily="18" charset="0"/>
                           <a:ea typeface="Cambria Math" panose="02040503050406030204" pitchFamily="18" charset="0"/>
                         </a:rPr>
                         <m:t>𝑝𝑟𝑜𝑗𝑒𝑐𝑡</m:t>
                       </m:r>
                       <m:r>
-                        <a:rPr lang="en-US" b="0" i="1" smtClean="0">
+                        <a:rPr lang="en-US" sz="2000" b="0" i="1" smtClean="0">
                           <a:latin typeface="Cambria Math" panose="02040503050406030204" pitchFamily="18" charset="0"/>
                           <a:ea typeface="Cambria Math" panose="02040503050406030204" pitchFamily="18" charset="0"/>
                         </a:rPr>
                         <m:t>+</m:t>
                       </m:r>
                       <m:r>
-                        <a:rPr lang="en-US" b="0" i="1" smtClean="0">
+                        <a:rPr lang="en-US" sz="2000" b="0" i="1" smtClean="0">
                           <a:latin typeface="Cambria Math" panose="02040503050406030204" pitchFamily="18" charset="0"/>
                           <a:ea typeface="Cambria Math" panose="02040503050406030204" pitchFamily="18" charset="0"/>
                         </a:rPr>
                         <m:t>𝑠𝑦𝑚𝑝𝑜𝑠𝑖𝑢𝑚</m:t>
                       </m:r>
                       <m:r>
-                        <a:rPr lang="en-US" b="0" i="1" smtClean="0">
+                        <a:rPr lang="en-US" sz="2000" b="0" i="1" smtClean="0">
                           <a:latin typeface="Cambria Math" panose="02040503050406030204" pitchFamily="18" charset="0"/>
                           <a:ea typeface="Cambria Math" panose="02040503050406030204" pitchFamily="18" charset="0"/>
                         </a:rPr>
                         <m:t> </m:t>
                       </m:r>
                       <m:r>
-                        <a:rPr lang="en-US" b="0" i="1" smtClean="0">
+                        <a:rPr lang="en-US" sz="2000" b="0" i="1" smtClean="0">
                           <a:latin typeface="Cambria Math" panose="02040503050406030204" pitchFamily="18" charset="0"/>
                           <a:ea typeface="Cambria Math" panose="02040503050406030204" pitchFamily="18" charset="0"/>
                         </a:rPr>
@@ -7385,7 +7347,7 @@
                     </m:oMath>
                   </m:oMathPara>
                 </a14:m>
-                <a:endParaRPr lang="it-IT" dirty="0"/>
+                <a:endParaRPr lang="it-IT" sz="2000" dirty="0"/>
               </a:p>
               <a:p>
                 <a:endParaRPr lang="it-IT" dirty="0"/>
@@ -7393,7 +7355,7 @@
             </p:txBody>
           </p:sp>
         </mc:Choice>
-        <mc:Fallback xmlns="">
+        <mc:Fallback>
           <p:sp>
             <p:nvSpPr>
               <p:cNvPr id="3" name="Segnaposto contenuto 2">
@@ -7418,7 +7380,7 @@
               <a:blipFill>
                 <a:blip r:embed="rId2"/>
                 <a:stretch>
-                  <a:fillRect l="-558" t="-1244" r="-335"/>
+                  <a:fillRect l="-670" t="-1741"/>
                 </a:stretch>
               </a:blipFill>
             </p:spPr>
